--- a/Holy Holy Holy-CH.pptx
+++ b/Holy Holy Holy-CH.pptx
@@ -7,7 +7,9 @@
   <p:sldIdLst>
     <p:sldId id="256" r:id="rId2"/>
     <p:sldId id="284" r:id="rId3"/>
-    <p:sldId id="276" r:id="rId4"/>
+    <p:sldId id="285" r:id="rId4"/>
+    <p:sldId id="286" r:id="rId5"/>
+    <p:sldId id="287" r:id="rId6"/>
   </p:sldIdLst>
   <p:sldSz cx="12192000" cy="6858000"/>
   <p:notesSz cx="6858000" cy="9144000"/>
@@ -3924,7 +3926,7 @@
                 <a:latin typeface="Avenir Medium" panose="02000503020000020003" pitchFamily="2" charset="0"/>
                 <a:ea typeface="Bodoni Ornaments" pitchFamily="2" charset="0"/>
               </a:rPr>
-              <a:t>C                G       F                C         </a:t>
+              <a:t>C                G     F               C         </a:t>
             </a:r>
           </a:p>
           <a:p>
@@ -3952,7 +3954,7 @@
                 <a:latin typeface="Avenir Medium" panose="02000503020000020003" pitchFamily="2" charset="0"/>
                 <a:ea typeface="Bodoni Ornaments" pitchFamily="2" charset="0"/>
               </a:rPr>
-              <a:t>G                   Am    </a:t>
+              <a:t>G                 Am               G              D        G </a:t>
             </a:r>
           </a:p>
           <a:p>
@@ -3980,7 +3982,7 @@
                 <a:latin typeface="Avenir Medium" panose="02000503020000020003" pitchFamily="2" charset="0"/>
                 <a:ea typeface="Bodoni Ornaments" pitchFamily="2" charset="0"/>
               </a:rPr>
-              <a:t>C                G        F                    C    </a:t>
+              <a:t>C                G     F                    C    </a:t>
             </a:r>
           </a:p>
           <a:p>
@@ -3995,7 +3997,7 @@
                 <a:latin typeface="Avenir Medium" panose="02000503020000020003" pitchFamily="2" charset="0"/>
                 <a:ea typeface="Bodoni Ornaments" pitchFamily="2" charset="0"/>
               </a:rPr>
-              <a:t>Holy, holy, holy, Merciful and mighty.</a:t>
+              <a:t>Holy, holy, holy, Merciful and mighty</a:t>
             </a:r>
           </a:p>
           <a:p>
@@ -4008,7 +4010,7 @@
                 <a:latin typeface="Avenir Medium" panose="02000503020000020003" pitchFamily="2" charset="0"/>
                 <a:ea typeface="Bodoni Ornaments" pitchFamily="2" charset="0"/>
               </a:rPr>
-              <a:t>Am                 C              F           G     C   </a:t>
+              <a:t>Am                C            F           G     C   </a:t>
             </a:r>
           </a:p>
           <a:p>
@@ -4047,9 +4049,7 @@
     <p:bg>
       <p:bgPr>
         <a:solidFill>
-          <a:schemeClr val="accent5">
-            <a:lumMod val="50000"/>
-          </a:schemeClr>
+          <a:schemeClr val="accent1"/>
         </a:solidFill>
         <a:effectLst/>
       </p:bgPr>
@@ -4059,7 +4059,7 @@
         <p:cNvPr id="1" name="">
           <a:extLst>
             <a:ext uri="{FF2B5EF4-FFF2-40B4-BE49-F238E27FC236}">
-              <a16:creationId xmlns:a16="http://schemas.microsoft.com/office/drawing/2014/main" id="{105C7419-E011-28A7-9A00-12DEA80269EF}"/>
+              <a16:creationId xmlns:a16="http://schemas.microsoft.com/office/drawing/2014/main" id="{4C469B19-28EF-3C30-9D80-FCE18A4C9E32}"/>
             </a:ext>
           </a:extLst>
         </p:cNvPr>
@@ -4079,7 +4079,7 @@
           <p:cNvPr id="3" name="Subtitle 2">
             <a:extLst>
               <a:ext uri="{FF2B5EF4-FFF2-40B4-BE49-F238E27FC236}">
-                <a16:creationId xmlns:a16="http://schemas.microsoft.com/office/drawing/2014/main" id="{76DA5D01-CA66-E4A3-D9BB-F19A657F5172}"/>
+                <a16:creationId xmlns:a16="http://schemas.microsoft.com/office/drawing/2014/main" id="{AFA4630E-778E-BB58-03D2-158E8983A726}"/>
               </a:ext>
             </a:extLst>
           </p:cNvPr>
@@ -4092,8 +4092,8 @@
         </p:nvSpPr>
         <p:spPr>
           <a:xfrm>
-            <a:off x="222738" y="211015"/>
-            <a:ext cx="11699631" cy="6482862"/>
+            <a:off x="175846" y="152399"/>
+            <a:ext cx="11828585" cy="6541477"/>
           </a:xfrm>
         </p:spPr>
         <p:txBody>
@@ -4103,16 +4103,6 @@
           <a:lstStyle/>
           <a:p>
             <a:pPr algn="l"/>
-            <a:r>
-              <a:rPr lang="en-US" sz="3600" dirty="0">
-                <a:solidFill>
-                  <a:schemeClr val="bg1"/>
-                </a:solidFill>
-                <a:latin typeface="Avenir Medium" panose="02000503020000020003" pitchFamily="2" charset="0"/>
-                <a:ea typeface="Bodoni Ornaments" pitchFamily="2" charset="0"/>
-              </a:rPr>
-              <a:t>         </a:t>
-            </a:r>
             <a:r>
               <a:rPr lang="en-US" sz="3600" dirty="0">
                 <a:solidFill>
@@ -4121,41 +4111,26 @@
                 <a:latin typeface="Avenir Medium" panose="02000503020000020003" pitchFamily="2" charset="0"/>
                 <a:ea typeface="Bodoni Ornaments" pitchFamily="2" charset="0"/>
               </a:rPr>
-              <a:t>C G                    D                        Em   </a:t>
-            </a:r>
-            <a:endParaRPr lang="en-US" sz="3600" dirty="0">
-              <a:solidFill>
-                <a:schemeClr val="bg1"/>
-              </a:solidFill>
-              <a:latin typeface="Avenir Medium" panose="02000503020000020003" pitchFamily="2" charset="0"/>
-              <a:ea typeface="Bodoni Ornaments" pitchFamily="2" charset="0"/>
-            </a:endParaRPr>
+              <a:t>C                G     F                   C         </a:t>
+            </a:r>
           </a:p>
           <a:p>
             <a:pPr algn="l"/>
             <a:r>
               <a:rPr lang="en-US" sz="3600" dirty="0">
                 <a:solidFill>
-                  <a:schemeClr val="bg1"/>
+                  <a:schemeClr val="bg1">
+                    <a:lumMod val="95000"/>
+                  </a:schemeClr>
                 </a:solidFill>
                 <a:latin typeface="Avenir Medium" panose="02000503020000020003" pitchFamily="2" charset="0"/>
                 <a:ea typeface="Bodoni Ornaments" pitchFamily="2" charset="0"/>
               </a:rPr>
-              <a:t>Hallelujah, praise the One who set me free</a:t>
+              <a:t>Holy, holy, holy, All the saints adore Thee,</a:t>
             </a:r>
           </a:p>
           <a:p>
             <a:pPr algn="l"/>
-            <a:r>
-              <a:rPr lang="en-US" sz="3600" dirty="0">
-                <a:solidFill>
-                  <a:schemeClr val="bg1"/>
-                </a:solidFill>
-                <a:latin typeface="Avenir Medium" panose="02000503020000020003" pitchFamily="2" charset="0"/>
-                <a:ea typeface="Bodoni Ornaments" pitchFamily="2" charset="0"/>
-              </a:rPr>
-              <a:t>         </a:t>
-            </a:r>
             <a:r>
               <a:rPr lang="en-US" sz="3600" dirty="0">
                 <a:solidFill>
@@ -4164,41 +4139,26 @@
                 <a:latin typeface="Avenir Medium" panose="02000503020000020003" pitchFamily="2" charset="0"/>
                 <a:ea typeface="Bodoni Ornaments" pitchFamily="2" charset="0"/>
               </a:rPr>
-              <a:t>C G                    D                        Em   </a:t>
-            </a:r>
-            <a:endParaRPr lang="en-US" sz="3600" dirty="0">
-              <a:solidFill>
-                <a:schemeClr val="bg1"/>
-              </a:solidFill>
-              <a:latin typeface="Avenir Medium" panose="02000503020000020003" pitchFamily="2" charset="0"/>
-              <a:ea typeface="Bodoni Ornaments" pitchFamily="2" charset="0"/>
-            </a:endParaRPr>
+              <a:t>G                             Am</a:t>
+            </a:r>
           </a:p>
           <a:p>
             <a:pPr algn="l"/>
             <a:r>
               <a:rPr lang="en-US" sz="3600" dirty="0">
                 <a:solidFill>
-                  <a:schemeClr val="bg1"/>
+                  <a:schemeClr val="bg1">
+                    <a:lumMod val="95000"/>
+                  </a:schemeClr>
                 </a:solidFill>
                 <a:latin typeface="Avenir Medium" panose="02000503020000020003" pitchFamily="2" charset="0"/>
                 <a:ea typeface="Bodoni Ornaments" pitchFamily="2" charset="0"/>
               </a:rPr>
-              <a:t>Hallelujah, death has lost its grip on me</a:t>
+              <a:t>Casting down their golden crowns</a:t>
             </a:r>
           </a:p>
           <a:p>
             <a:pPr algn="l"/>
-            <a:r>
-              <a:rPr lang="en-US" sz="3600" dirty="0">
-                <a:solidFill>
-                  <a:schemeClr val="bg1"/>
-                </a:solidFill>
-                <a:latin typeface="Avenir Medium" panose="02000503020000020003" pitchFamily="2" charset="0"/>
-                <a:ea typeface="Bodoni Ornaments" pitchFamily="2" charset="0"/>
-              </a:rPr>
-              <a:t>                 </a:t>
-            </a:r>
             <a:r>
               <a:rPr lang="en-US" sz="3600" dirty="0">
                 <a:solidFill>
@@ -4207,11 +4167,13 @@
                 <a:latin typeface="Avenir Medium" panose="02000503020000020003" pitchFamily="2" charset="0"/>
                 <a:ea typeface="Bodoni Ornaments" pitchFamily="2" charset="0"/>
               </a:rPr>
-              <a:t>C                   G</a:t>
+              <a:t>G                D        G</a:t>
             </a:r>
             <a:endParaRPr lang="en-US" sz="3600" dirty="0">
               <a:solidFill>
-                <a:schemeClr val="bg1"/>
+                <a:schemeClr val="bg1">
+                  <a:lumMod val="95000"/>
+                </a:schemeClr>
               </a:solidFill>
               <a:latin typeface="Avenir Medium" panose="02000503020000020003" pitchFamily="2" charset="0"/>
               <a:ea typeface="Bodoni Ornaments" pitchFamily="2" charset="0"/>
@@ -4222,12 +4184,14 @@
             <a:r>
               <a:rPr lang="en-US" sz="3600" dirty="0">
                 <a:solidFill>
-                  <a:schemeClr val="bg1"/>
+                  <a:schemeClr val="bg1">
+                    <a:lumMod val="95000"/>
+                  </a:schemeClr>
                 </a:solidFill>
                 <a:latin typeface="Avenir Medium" panose="02000503020000020003" pitchFamily="2" charset="0"/>
                 <a:ea typeface="Bodoni Ornaments" pitchFamily="2" charset="0"/>
               </a:rPr>
-              <a:t>You have broken every chain</a:t>
+              <a:t>around the glassy sea;</a:t>
             </a:r>
           </a:p>
           <a:p>
@@ -4240,7 +4204,7 @@
                 <a:latin typeface="Avenir Medium" panose="02000503020000020003" pitchFamily="2" charset="0"/>
                 <a:ea typeface="Bodoni Ornaments" pitchFamily="2" charset="0"/>
               </a:rPr>
-              <a:t>                D                         Em   D</a:t>
+              <a:t>C                     G             F                    C    </a:t>
             </a:r>
           </a:p>
           <a:p>
@@ -4248,12 +4212,14 @@
             <a:r>
               <a:rPr lang="en-US" sz="3600" dirty="0">
                 <a:solidFill>
-                  <a:schemeClr val="bg1"/>
+                  <a:schemeClr val="bg1">
+                    <a:lumMod val="95000"/>
+                  </a:schemeClr>
                 </a:solidFill>
                 <a:latin typeface="Avenir Medium" panose="02000503020000020003" pitchFamily="2" charset="0"/>
                 <a:ea typeface="Bodoni Ornaments" pitchFamily="2" charset="0"/>
               </a:rPr>
-              <a:t>There's salvation in Your name</a:t>
+              <a:t>Cherubim and seraphim falling down before Thee,</a:t>
             </a:r>
           </a:p>
           <a:p>
@@ -4266,7 +4232,7 @@
                 <a:latin typeface="Avenir Medium" panose="02000503020000020003" pitchFamily="2" charset="0"/>
                 <a:ea typeface="Bodoni Ornaments" pitchFamily="2" charset="0"/>
               </a:rPr>
-              <a:t>          C                D        G</a:t>
+              <a:t>Am                  C         F     G               C   </a:t>
             </a:r>
           </a:p>
           <a:p>
@@ -4274,12 +4240,14 @@
             <a:r>
               <a:rPr lang="en-US" sz="3600" dirty="0">
                 <a:solidFill>
-                  <a:schemeClr val="bg1"/>
+                  <a:schemeClr val="bg1">
+                    <a:lumMod val="95000"/>
+                  </a:schemeClr>
                 </a:solidFill>
                 <a:latin typeface="Avenir Medium" panose="02000503020000020003" pitchFamily="2" charset="0"/>
                 <a:ea typeface="Bodoni Ornaments" pitchFamily="2" charset="0"/>
               </a:rPr>
-              <a:t>Jesus Christ, my living hope</a:t>
+              <a:t>Who was, and is, and evermore shall be</a:t>
             </a:r>
           </a:p>
         </p:txBody>
@@ -4287,7 +4255,451 @@
     </p:spTree>
     <p:extLst>
       <p:ext uri="{BB962C8B-B14F-4D97-AF65-F5344CB8AC3E}">
-        <p14:creationId xmlns:p14="http://schemas.microsoft.com/office/powerpoint/2010/main" val="4254184139"/>
+        <p14:creationId xmlns:p14="http://schemas.microsoft.com/office/powerpoint/2010/main" val="2942247009"/>
+      </p:ext>
+    </p:extLst>
+  </p:cSld>
+  <p:clrMapOvr>
+    <a:masterClrMapping/>
+  </p:clrMapOvr>
+</p:sld>
+</file>
+
+<file path=ppt/slides/slide4.xml><?xml version="1.0" encoding="utf-8"?>
+<p:sld xmlns:a="http://schemas.openxmlformats.org/drawingml/2006/main" xmlns:r="http://schemas.openxmlformats.org/officeDocument/2006/relationships" xmlns:p="http://schemas.openxmlformats.org/presentationml/2006/main">
+  <p:cSld>
+    <p:bg>
+      <p:bgPr>
+        <a:solidFill>
+          <a:schemeClr val="accent1"/>
+        </a:solidFill>
+        <a:effectLst/>
+      </p:bgPr>
+    </p:bg>
+    <p:spTree>
+      <p:nvGrpSpPr>
+        <p:cNvPr id="1" name="">
+          <a:extLst>
+            <a:ext uri="{FF2B5EF4-FFF2-40B4-BE49-F238E27FC236}">
+              <a16:creationId xmlns:a16="http://schemas.microsoft.com/office/drawing/2014/main" id="{5626F3EB-0161-41ED-EF7A-24A1B3DFD222}"/>
+            </a:ext>
+          </a:extLst>
+        </p:cNvPr>
+        <p:cNvGrpSpPr/>
+        <p:nvPr/>
+      </p:nvGrpSpPr>
+      <p:grpSpPr>
+        <a:xfrm>
+          <a:off x="0" y="0"/>
+          <a:ext cx="0" cy="0"/>
+          <a:chOff x="0" y="0"/>
+          <a:chExt cx="0" cy="0"/>
+        </a:xfrm>
+      </p:grpSpPr>
+      <p:sp>
+        <p:nvSpPr>
+          <p:cNvPr id="3" name="Subtitle 2">
+            <a:extLst>
+              <a:ext uri="{FF2B5EF4-FFF2-40B4-BE49-F238E27FC236}">
+                <a16:creationId xmlns:a16="http://schemas.microsoft.com/office/drawing/2014/main" id="{94987133-15C5-4C15-EAF0-512496348ABF}"/>
+              </a:ext>
+            </a:extLst>
+          </p:cNvPr>
+          <p:cNvSpPr>
+            <a:spLocks noGrp="1"/>
+          </p:cNvSpPr>
+          <p:nvPr>
+            <p:ph type="subTitle" idx="1"/>
+          </p:nvPr>
+        </p:nvSpPr>
+        <p:spPr>
+          <a:xfrm>
+            <a:off x="175846" y="152399"/>
+            <a:ext cx="11828585" cy="6541477"/>
+          </a:xfrm>
+        </p:spPr>
+        <p:txBody>
+          <a:bodyPr>
+            <a:noAutofit/>
+          </a:bodyPr>
+          <a:lstStyle/>
+          <a:p>
+            <a:pPr algn="l"/>
+            <a:r>
+              <a:rPr lang="en-US" sz="3600" dirty="0">
+                <a:solidFill>
+                  <a:srgbClr val="FFFF00"/>
+                </a:solidFill>
+                <a:latin typeface="Avenir Medium" panose="02000503020000020003" pitchFamily="2" charset="0"/>
+                <a:ea typeface="Bodoni Ornaments" pitchFamily="2" charset="0"/>
+              </a:rPr>
+              <a:t>C       Am  G      F                                 C         </a:t>
+            </a:r>
+          </a:p>
+          <a:p>
+            <a:pPr algn="l"/>
+            <a:r>
+              <a:rPr lang="en-US" sz="3600" dirty="0">
+                <a:solidFill>
+                  <a:schemeClr val="bg1">
+                    <a:lumMod val="95000"/>
+                  </a:schemeClr>
+                </a:solidFill>
+                <a:latin typeface="Avenir Medium" panose="02000503020000020003" pitchFamily="2" charset="0"/>
+                <a:ea typeface="Bodoni Ornaments" pitchFamily="2" charset="0"/>
+              </a:rPr>
+              <a:t>Holy, holy, holy, Though the darkness hide Thee,</a:t>
+            </a:r>
+          </a:p>
+          <a:p>
+            <a:pPr algn="l"/>
+            <a:r>
+              <a:rPr lang="en-US" sz="3600" dirty="0">
+                <a:solidFill>
+                  <a:srgbClr val="FFFF00"/>
+                </a:solidFill>
+                <a:latin typeface="Avenir Medium" panose="02000503020000020003" pitchFamily="2" charset="0"/>
+                <a:ea typeface="Bodoni Ornaments" pitchFamily="2" charset="0"/>
+              </a:rPr>
+              <a:t>G                             Am                 G       D           G</a:t>
+            </a:r>
+          </a:p>
+          <a:p>
+            <a:pPr algn="l"/>
+            <a:r>
+              <a:rPr lang="en-US" sz="3600" dirty="0">
+                <a:solidFill>
+                  <a:schemeClr val="bg1">
+                    <a:lumMod val="95000"/>
+                  </a:schemeClr>
+                </a:solidFill>
+                <a:latin typeface="Avenir Medium" panose="02000503020000020003" pitchFamily="2" charset="0"/>
+                <a:ea typeface="Bodoni Ornaments" pitchFamily="2" charset="0"/>
+              </a:rPr>
+              <a:t>Though the eye of sinful man Thy glory may not see;</a:t>
+            </a:r>
+          </a:p>
+          <a:p>
+            <a:pPr algn="l"/>
+            <a:r>
+              <a:rPr lang="en-US" sz="3600" dirty="0">
+                <a:solidFill>
+                  <a:srgbClr val="FFFF00"/>
+                </a:solidFill>
+                <a:latin typeface="Avenir Medium" panose="02000503020000020003" pitchFamily="2" charset="0"/>
+                <a:ea typeface="Bodoni Ornaments" pitchFamily="2" charset="0"/>
+              </a:rPr>
+              <a:t>C.     Am         G</a:t>
+            </a:r>
+            <a:endParaRPr lang="en-US" sz="3600" dirty="0">
+              <a:solidFill>
+                <a:schemeClr val="bg1">
+                  <a:lumMod val="95000"/>
+                </a:schemeClr>
+              </a:solidFill>
+              <a:latin typeface="Avenir Medium" panose="02000503020000020003" pitchFamily="2" charset="0"/>
+              <a:ea typeface="Bodoni Ornaments" pitchFamily="2" charset="0"/>
+            </a:endParaRPr>
+          </a:p>
+          <a:p>
+            <a:pPr algn="l"/>
+            <a:r>
+              <a:rPr lang="en-US" sz="3600" dirty="0">
+                <a:solidFill>
+                  <a:schemeClr val="bg1">
+                    <a:lumMod val="95000"/>
+                  </a:schemeClr>
+                </a:solidFill>
+                <a:latin typeface="Avenir Medium" panose="02000503020000020003" pitchFamily="2" charset="0"/>
+                <a:ea typeface="Bodoni Ornaments" pitchFamily="2" charset="0"/>
+              </a:rPr>
+              <a:t>Only Thou art holy;</a:t>
+            </a:r>
+          </a:p>
+          <a:p>
+            <a:pPr algn="l"/>
+            <a:r>
+              <a:rPr lang="en-US" sz="3600" dirty="0">
+                <a:solidFill>
+                  <a:srgbClr val="FFFF00"/>
+                </a:solidFill>
+                <a:latin typeface="Avenir Medium" panose="02000503020000020003" pitchFamily="2" charset="0"/>
+                <a:ea typeface="Bodoni Ornaments" pitchFamily="2" charset="0"/>
+              </a:rPr>
+              <a:t>F                    C    </a:t>
+            </a:r>
+          </a:p>
+          <a:p>
+            <a:pPr algn="l"/>
+            <a:r>
+              <a:rPr lang="en-US" sz="3600" dirty="0">
+                <a:solidFill>
+                  <a:schemeClr val="bg1">
+                    <a:lumMod val="95000"/>
+                  </a:schemeClr>
+                </a:solidFill>
+                <a:latin typeface="Avenir Medium" panose="02000503020000020003" pitchFamily="2" charset="0"/>
+                <a:ea typeface="Bodoni Ornaments" pitchFamily="2" charset="0"/>
+              </a:rPr>
+              <a:t>there is none beside Thee,</a:t>
+            </a:r>
+          </a:p>
+          <a:p>
+            <a:pPr algn="l"/>
+            <a:r>
+              <a:rPr lang="en-US" sz="3600" dirty="0">
+                <a:solidFill>
+                  <a:srgbClr val="FFFF00"/>
+                </a:solidFill>
+                <a:latin typeface="Avenir Medium" panose="02000503020000020003" pitchFamily="2" charset="0"/>
+                <a:ea typeface="Bodoni Ornaments" pitchFamily="2" charset="0"/>
+              </a:rPr>
+              <a:t>Am           C             F              G     C   </a:t>
+            </a:r>
+          </a:p>
+          <a:p>
+            <a:pPr algn="l"/>
+            <a:r>
+              <a:rPr lang="en-US" sz="3600" dirty="0">
+                <a:solidFill>
+                  <a:schemeClr val="bg1">
+                    <a:lumMod val="95000"/>
+                  </a:schemeClr>
+                </a:solidFill>
+                <a:latin typeface="Avenir Medium" panose="02000503020000020003" pitchFamily="2" charset="0"/>
+                <a:ea typeface="Bodoni Ornaments" pitchFamily="2" charset="0"/>
+              </a:rPr>
+              <a:t>Perfect in power, in love, and purity</a:t>
+            </a:r>
+          </a:p>
+        </p:txBody>
+      </p:sp>
+    </p:spTree>
+    <p:extLst>
+      <p:ext uri="{BB962C8B-B14F-4D97-AF65-F5344CB8AC3E}">
+        <p14:creationId xmlns:p14="http://schemas.microsoft.com/office/powerpoint/2010/main" val="1658787609"/>
+      </p:ext>
+    </p:extLst>
+  </p:cSld>
+  <p:clrMapOvr>
+    <a:masterClrMapping/>
+  </p:clrMapOvr>
+</p:sld>
+</file>
+
+<file path=ppt/slides/slide5.xml><?xml version="1.0" encoding="utf-8"?>
+<p:sld xmlns:a="http://schemas.openxmlformats.org/drawingml/2006/main" xmlns:r="http://schemas.openxmlformats.org/officeDocument/2006/relationships" xmlns:p="http://schemas.openxmlformats.org/presentationml/2006/main">
+  <p:cSld>
+    <p:bg>
+      <p:bgPr>
+        <a:solidFill>
+          <a:schemeClr val="accent1"/>
+        </a:solidFill>
+        <a:effectLst/>
+      </p:bgPr>
+    </p:bg>
+    <p:spTree>
+      <p:nvGrpSpPr>
+        <p:cNvPr id="1" name="">
+          <a:extLst>
+            <a:ext uri="{FF2B5EF4-FFF2-40B4-BE49-F238E27FC236}">
+              <a16:creationId xmlns:a16="http://schemas.microsoft.com/office/drawing/2014/main" id="{92F987D7-820F-9450-F145-0FE9D2035DC6}"/>
+            </a:ext>
+          </a:extLst>
+        </p:cNvPr>
+        <p:cNvGrpSpPr/>
+        <p:nvPr/>
+      </p:nvGrpSpPr>
+      <p:grpSpPr>
+        <a:xfrm>
+          <a:off x="0" y="0"/>
+          <a:ext cx="0" cy="0"/>
+          <a:chOff x="0" y="0"/>
+          <a:chExt cx="0" cy="0"/>
+        </a:xfrm>
+      </p:grpSpPr>
+      <p:sp>
+        <p:nvSpPr>
+          <p:cNvPr id="3" name="Subtitle 2">
+            <a:extLst>
+              <a:ext uri="{FF2B5EF4-FFF2-40B4-BE49-F238E27FC236}">
+                <a16:creationId xmlns:a16="http://schemas.microsoft.com/office/drawing/2014/main" id="{C592DB66-C2B4-511E-67C3-CB3E79A6FA5E}"/>
+              </a:ext>
+            </a:extLst>
+          </p:cNvPr>
+          <p:cNvSpPr>
+            <a:spLocks noGrp="1"/>
+          </p:cNvSpPr>
+          <p:nvPr>
+            <p:ph type="subTitle" idx="1"/>
+          </p:nvPr>
+        </p:nvSpPr>
+        <p:spPr>
+          <a:xfrm>
+            <a:off x="175846" y="152399"/>
+            <a:ext cx="11828585" cy="6541477"/>
+          </a:xfrm>
+        </p:spPr>
+        <p:txBody>
+          <a:bodyPr>
+            <a:noAutofit/>
+          </a:bodyPr>
+          <a:lstStyle/>
+          <a:p>
+            <a:pPr algn="l"/>
+            <a:r>
+              <a:rPr lang="en-US" sz="3600" dirty="0">
+                <a:solidFill>
+                  <a:srgbClr val="FFFF00"/>
+                </a:solidFill>
+                <a:latin typeface="Avenir Medium" panose="02000503020000020003" pitchFamily="2" charset="0"/>
+                <a:ea typeface="Bodoni Ornaments" pitchFamily="2" charset="0"/>
+              </a:rPr>
+              <a:t>C       Am  G      F               C         </a:t>
+            </a:r>
+          </a:p>
+          <a:p>
+            <a:pPr algn="l"/>
+            <a:r>
+              <a:rPr lang="en-US" sz="3600" dirty="0">
+                <a:solidFill>
+                  <a:schemeClr val="bg1">
+                    <a:lumMod val="95000"/>
+                  </a:schemeClr>
+                </a:solidFill>
+                <a:latin typeface="Avenir Medium" panose="02000503020000020003" pitchFamily="2" charset="0"/>
+                <a:ea typeface="Bodoni Ornaments" pitchFamily="2" charset="0"/>
+              </a:rPr>
+              <a:t>Holy, holy, holy, Lord God Almighty</a:t>
+            </a:r>
+          </a:p>
+          <a:p>
+            <a:pPr algn="l"/>
+            <a:r>
+              <a:rPr lang="en-US" sz="3600" dirty="0">
+                <a:solidFill>
+                  <a:srgbClr val="FFFF00"/>
+                </a:solidFill>
+                <a:latin typeface="Avenir Medium" panose="02000503020000020003" pitchFamily="2" charset="0"/>
+                <a:ea typeface="Bodoni Ornaments" pitchFamily="2" charset="0"/>
+              </a:rPr>
+              <a:t>G                             Am                 </a:t>
+            </a:r>
+          </a:p>
+          <a:p>
+            <a:pPr algn="l"/>
+            <a:r>
+              <a:rPr lang="en-US" sz="3600" dirty="0">
+                <a:solidFill>
+                  <a:schemeClr val="bg1">
+                    <a:lumMod val="95000"/>
+                  </a:schemeClr>
+                </a:solidFill>
+                <a:latin typeface="Avenir Medium" panose="02000503020000020003" pitchFamily="2" charset="0"/>
+                <a:ea typeface="Bodoni Ornaments" pitchFamily="2" charset="0"/>
+              </a:rPr>
+              <a:t>All Thy works shall praise Thy name,</a:t>
+            </a:r>
+          </a:p>
+          <a:p>
+            <a:pPr algn="l"/>
+            <a:r>
+              <a:rPr lang="en-US" sz="3600" dirty="0">
+                <a:solidFill>
+                  <a:srgbClr val="FFFF00"/>
+                </a:solidFill>
+                <a:latin typeface="Avenir Medium" panose="02000503020000020003" pitchFamily="2" charset="0"/>
+                <a:ea typeface="Bodoni Ornaments" pitchFamily="2" charset="0"/>
+              </a:rPr>
+              <a:t>    G               D          G</a:t>
+            </a:r>
+            <a:endParaRPr lang="en-US" sz="3600" dirty="0">
+              <a:solidFill>
+                <a:schemeClr val="bg1">
+                  <a:lumMod val="95000"/>
+                </a:schemeClr>
+              </a:solidFill>
+              <a:latin typeface="Avenir Medium" panose="02000503020000020003" pitchFamily="2" charset="0"/>
+              <a:ea typeface="Bodoni Ornaments" pitchFamily="2" charset="0"/>
+            </a:endParaRPr>
+          </a:p>
+          <a:p>
+            <a:pPr algn="l"/>
+            <a:r>
+              <a:rPr lang="en-US" sz="3600" dirty="0">
+                <a:solidFill>
+                  <a:schemeClr val="bg1">
+                    <a:lumMod val="95000"/>
+                  </a:schemeClr>
+                </a:solidFill>
+                <a:latin typeface="Avenir Medium" panose="02000503020000020003" pitchFamily="2" charset="0"/>
+                <a:ea typeface="Bodoni Ornaments" pitchFamily="2" charset="0"/>
+              </a:rPr>
+              <a:t>in earth, and sky, and sea;</a:t>
+            </a:r>
+          </a:p>
+          <a:p>
+            <a:pPr algn="l"/>
+            <a:r>
+              <a:rPr lang="en-US" sz="3600" dirty="0">
+                <a:solidFill>
+                  <a:srgbClr val="FFFF00"/>
+                </a:solidFill>
+                <a:latin typeface="Avenir Medium" panose="02000503020000020003" pitchFamily="2" charset="0"/>
+                <a:ea typeface="Bodoni Ornaments" pitchFamily="2" charset="0"/>
+              </a:rPr>
+              <a:t>C       Am  G      F                   C    </a:t>
+            </a:r>
+          </a:p>
+          <a:p>
+            <a:pPr algn="l"/>
+            <a:r>
+              <a:rPr lang="en-US" sz="3600" dirty="0">
+                <a:solidFill>
+                  <a:schemeClr val="bg1">
+                    <a:lumMod val="95000"/>
+                  </a:schemeClr>
+                </a:solidFill>
+                <a:latin typeface="Avenir Medium" panose="02000503020000020003" pitchFamily="2" charset="0"/>
+                <a:ea typeface="Bodoni Ornaments" pitchFamily="2" charset="0"/>
+              </a:rPr>
+              <a:t>Holy, holy, holy, Merciful and mighty</a:t>
+            </a:r>
+          </a:p>
+          <a:p>
+            <a:pPr algn="l"/>
+            <a:r>
+              <a:rPr lang="en-US" sz="3600" dirty="0">
+                <a:solidFill>
+                  <a:srgbClr val="FFFF00"/>
+                </a:solidFill>
+                <a:latin typeface="Avenir Medium" panose="02000503020000020003" pitchFamily="2" charset="0"/>
+                <a:ea typeface="Bodoni Ornaments" pitchFamily="2" charset="0"/>
+              </a:rPr>
+              <a:t>Am                C            F           G     C   </a:t>
+            </a:r>
+          </a:p>
+          <a:p>
+            <a:pPr algn="l"/>
+            <a:r>
+              <a:rPr lang="en-US" sz="3600" dirty="0">
+                <a:solidFill>
+                  <a:schemeClr val="bg1">
+                    <a:lumMod val="95000"/>
+                  </a:schemeClr>
+                </a:solidFill>
+                <a:latin typeface="Avenir Medium" panose="02000503020000020003" pitchFamily="2" charset="0"/>
+                <a:ea typeface="Bodoni Ornaments" pitchFamily="2" charset="0"/>
+              </a:rPr>
+              <a:t>God in three Persons, blessed Trinity</a:t>
+            </a:r>
+          </a:p>
+        </p:txBody>
+      </p:sp>
+    </p:spTree>
+    <p:extLst>
+      <p:ext uri="{BB962C8B-B14F-4D97-AF65-F5344CB8AC3E}">
+        <p14:creationId xmlns:p14="http://schemas.microsoft.com/office/powerpoint/2010/main" val="2513268142"/>
       </p:ext>
     </p:extLst>
   </p:cSld>
